--- a/00_オリエンテーション/【AI Native研修-提案研修】研修の概要.pptx
+++ b/00_オリエンテーション/【AI Native研修-提案研修】研修の概要.pptx
@@ -4541,9 +4541,10 @@
           <a:lstStyle/>
           <a:p>
             <a:r>
-              <a:rPr kumimoji="1" lang="ja-JP" altLang="en-US" dirty="0"/>
-              <a:t>提案演習の概要</a:t>
-            </a:r>
+              <a:rPr lang="ja-JP" altLang="en-US" dirty="0"/>
+              <a:t>研修の概要</a:t>
+            </a:r>
+            <a:endParaRPr kumimoji="1" lang="ja-JP" altLang="en-US" dirty="0"/>
           </a:p>
         </p:txBody>
       </p:sp>

--- a/00_オリエンテーション/【AI Native研修-提案研修】研修の概要.pptx
+++ b/00_オリエンテーション/【AI Native研修-提案研修】研修の概要.pptx
@@ -1708,7 +1708,7 @@
 </file>
 
 <file path=ppt/slideLayouts/slideLayout2.xml><?xml version="1.0" encoding="utf-8"?>
-<p:sldLayout xmlns:a="http://schemas.openxmlformats.org/drawingml/2006/main" xmlns:r="http://schemas.openxmlformats.org/officeDocument/2006/relationships" xmlns:p="http://schemas.openxmlformats.org/presentationml/2006/main" type="obj" preserve="1">
+<p:sldLayout xmlns:a="http://schemas.openxmlformats.org/drawingml/2006/main" xmlns:r="http://schemas.openxmlformats.org/officeDocument/2006/relationships" xmlns:p="http://schemas.openxmlformats.org/presentationml/2006/main" preserve="1" userDrawn="1">
   <p:cSld name="タイトルとコンテンツ">
     <p:spTree>
       <p:nvGrpSpPr>
@@ -1726,10 +1726,93 @@
       </p:grpSpPr>
       <p:sp>
         <p:nvSpPr>
-          <p:cNvPr id="2" name="タイトル 1">
-            <a:extLst>
-              <a:ext uri="{FF2B5EF4-FFF2-40B4-BE49-F238E27FC236}">
-                <a16:creationId xmlns:a16="http://schemas.microsoft.com/office/drawing/2014/main" id="{8B9C75F2-6284-9EE3-07F1-8A8C63284933}"/>
+          <p:cNvPr id="4" name="日付プレースホルダー 3">
+            <a:extLst>
+              <a:ext uri="{FF2B5EF4-FFF2-40B4-BE49-F238E27FC236}">
+                <a16:creationId xmlns:a16="http://schemas.microsoft.com/office/drawing/2014/main" id="{311DBD3B-56FD-917A-7F5A-3015D9774F18}"/>
+              </a:ext>
+            </a:extLst>
+          </p:cNvPr>
+          <p:cNvSpPr>
+            <a:spLocks noGrp="1"/>
+          </p:cNvSpPr>
+          <p:nvPr>
+            <p:ph type="dt" sz="half" idx="10"/>
+          </p:nvPr>
+        </p:nvSpPr>
+        <p:spPr/>
+        <p:txBody>
+          <a:bodyPr/>
+          <a:lstStyle/>
+          <a:p>
+            <a:fld id="{E3EFBC31-9ECA-48C0-910F-E09377915FB8}" type="datetimeFigureOut">
+              <a:rPr kumimoji="1" lang="ja-JP" altLang="en-US" smtClean="0"/>
+              <a:t>2026/7/5</a:t>
+            </a:fld>
+            <a:endParaRPr kumimoji="1" lang="ja-JP" altLang="en-US"/>
+          </a:p>
+        </p:txBody>
+      </p:sp>
+      <p:sp>
+        <p:nvSpPr>
+          <p:cNvPr id="5" name="フッター プレースホルダー 4">
+            <a:extLst>
+              <a:ext uri="{FF2B5EF4-FFF2-40B4-BE49-F238E27FC236}">
+                <a16:creationId xmlns:a16="http://schemas.microsoft.com/office/drawing/2014/main" id="{8F2DC64E-F29E-D854-BEF0-3070C545D5CA}"/>
+              </a:ext>
+            </a:extLst>
+          </p:cNvPr>
+          <p:cNvSpPr>
+            <a:spLocks noGrp="1"/>
+          </p:cNvSpPr>
+          <p:nvPr>
+            <p:ph type="ftr" sz="quarter" idx="11"/>
+          </p:nvPr>
+        </p:nvSpPr>
+        <p:spPr/>
+        <p:txBody>
+          <a:bodyPr/>
+          <a:lstStyle/>
+          <a:p>
+            <a:endParaRPr kumimoji="1" lang="ja-JP" altLang="en-US"/>
+          </a:p>
+        </p:txBody>
+      </p:sp>
+      <p:sp>
+        <p:nvSpPr>
+          <p:cNvPr id="6" name="スライド番号プレースホルダー 5">
+            <a:extLst>
+              <a:ext uri="{FF2B5EF4-FFF2-40B4-BE49-F238E27FC236}">
+                <a16:creationId xmlns:a16="http://schemas.microsoft.com/office/drawing/2014/main" id="{7548F59C-A5D5-E9EE-6BFB-1E812ECDBA45}"/>
+              </a:ext>
+            </a:extLst>
+          </p:cNvPr>
+          <p:cNvSpPr>
+            <a:spLocks noGrp="1"/>
+          </p:cNvSpPr>
+          <p:nvPr>
+            <p:ph type="sldNum" sz="quarter" idx="12"/>
+          </p:nvPr>
+        </p:nvSpPr>
+        <p:spPr/>
+        <p:txBody>
+          <a:bodyPr/>
+          <a:lstStyle/>
+          <a:p>
+            <a:fld id="{9EBFBC76-F46F-4ADD-8228-9529630895ED}" type="slidenum">
+              <a:rPr kumimoji="1" lang="ja-JP" altLang="en-US" smtClean="0"/>
+              <a:t>‹#›</a:t>
+            </a:fld>
+            <a:endParaRPr kumimoji="1" lang="ja-JP" altLang="en-US"/>
+          </a:p>
+        </p:txBody>
+      </p:sp>
+      <p:sp>
+        <p:nvSpPr>
+          <p:cNvPr id="7" name="タイトル 1">
+            <a:extLst>
+              <a:ext uri="{FF2B5EF4-FFF2-40B4-BE49-F238E27FC236}">
+                <a16:creationId xmlns:a16="http://schemas.microsoft.com/office/drawing/2014/main" id="{01664F20-F7C0-E482-4CCD-A50874056B4D}"/>
               </a:ext>
             </a:extLst>
           </p:cNvPr>
@@ -1740,13 +1823,27 @@
             <p:ph type="title"/>
           </p:nvPr>
         </p:nvSpPr>
-        <p:spPr/>
-        <p:txBody>
-          <a:bodyPr/>
-          <a:lstStyle/>
-          <a:p>
-            <a:r>
-              <a:rPr kumimoji="1" lang="ja-JP" altLang="en-US"/>
+        <p:spPr>
+          <a:xfrm>
+            <a:off x="167951" y="365124"/>
+            <a:ext cx="11877869" cy="540000"/>
+          </a:xfrm>
+        </p:spPr>
+        <p:txBody>
+          <a:bodyPr>
+            <a:normAutofit/>
+          </a:bodyPr>
+          <a:lstStyle>
+            <a:lvl1pPr>
+              <a:defRPr sz="2400" b="1">
+                <a:latin typeface="Meiryo UI" panose="020B0604030504040204" pitchFamily="50" charset="-128"/>
+                <a:ea typeface="Meiryo UI" panose="020B0604030504040204" pitchFamily="50" charset="-128"/>
+              </a:defRPr>
+            </a:lvl1pPr>
+          </a:lstStyle>
+          <a:p>
+            <a:r>
+              <a:rPr kumimoji="1" lang="ja-JP" altLang="en-US" dirty="0"/>
               <a:t>マスター タイトルの書式設定</a:t>
             </a:r>
           </a:p>
@@ -1754,10 +1851,10 @@
       </p:sp>
       <p:sp>
         <p:nvSpPr>
-          <p:cNvPr id="3" name="コンテンツ プレースホルダー 2">
-            <a:extLst>
-              <a:ext uri="{FF2B5EF4-FFF2-40B4-BE49-F238E27FC236}">
-                <a16:creationId xmlns:a16="http://schemas.microsoft.com/office/drawing/2014/main" id="{03BB957D-55BF-E429-F24B-9AB0F2BC57A6}"/>
+          <p:cNvPr id="8" name="コンテンツ プレースホルダー 2">
+            <a:extLst>
+              <a:ext uri="{FF2B5EF4-FFF2-40B4-BE49-F238E27FC236}">
+                <a16:creationId xmlns:a16="http://schemas.microsoft.com/office/drawing/2014/main" id="{759E38C0-9660-9A49-7A90-097EDCC0796E}"/>
               </a:ext>
             </a:extLst>
           </p:cNvPr>
@@ -1768,159 +1865,81 @@
             <p:ph idx="1"/>
           </p:nvPr>
         </p:nvSpPr>
-        <p:spPr/>
+        <p:spPr>
+          <a:xfrm>
+            <a:off x="167951" y="1073020"/>
+            <a:ext cx="11877869" cy="5103943"/>
+          </a:xfrm>
+        </p:spPr>
         <p:txBody>
           <a:bodyPr/>
           <a:lstStyle/>
           <a:p>
             <a:pPr lvl="0"/>
             <a:r>
-              <a:rPr kumimoji="1" lang="ja-JP" altLang="en-US"/>
+              <a:rPr kumimoji="1" lang="ja-JP" altLang="en-US" dirty="0"/>
               <a:t>マスター テキストの書式設定</a:t>
             </a:r>
           </a:p>
           <a:p>
             <a:pPr lvl="1"/>
             <a:r>
-              <a:rPr kumimoji="1" lang="ja-JP" altLang="en-US"/>
+              <a:rPr kumimoji="1" lang="ja-JP" altLang="en-US" dirty="0"/>
               <a:t>第 </a:t>
             </a:r>
             <a:r>
-              <a:rPr kumimoji="1" lang="en-US" altLang="ja-JP"/>
+              <a:rPr kumimoji="1" lang="en-US" altLang="ja-JP" dirty="0"/>
               <a:t>2 </a:t>
             </a:r>
             <a:r>
-              <a:rPr kumimoji="1" lang="ja-JP" altLang="en-US"/>
+              <a:rPr kumimoji="1" lang="ja-JP" altLang="en-US" dirty="0"/>
               <a:t>レベル</a:t>
             </a:r>
           </a:p>
           <a:p>
             <a:pPr lvl="2"/>
             <a:r>
-              <a:rPr kumimoji="1" lang="ja-JP" altLang="en-US"/>
+              <a:rPr kumimoji="1" lang="ja-JP" altLang="en-US" dirty="0"/>
               <a:t>第 </a:t>
             </a:r>
             <a:r>
-              <a:rPr kumimoji="1" lang="en-US" altLang="ja-JP"/>
+              <a:rPr kumimoji="1" lang="en-US" altLang="ja-JP" dirty="0"/>
               <a:t>3 </a:t>
             </a:r>
             <a:r>
-              <a:rPr kumimoji="1" lang="ja-JP" altLang="en-US"/>
+              <a:rPr kumimoji="1" lang="ja-JP" altLang="en-US" dirty="0"/>
               <a:t>レベル</a:t>
             </a:r>
           </a:p>
           <a:p>
             <a:pPr lvl="3"/>
             <a:r>
-              <a:rPr kumimoji="1" lang="ja-JP" altLang="en-US"/>
+              <a:rPr kumimoji="1" lang="ja-JP" altLang="en-US" dirty="0"/>
               <a:t>第 </a:t>
             </a:r>
             <a:r>
-              <a:rPr kumimoji="1" lang="en-US" altLang="ja-JP"/>
+              <a:rPr kumimoji="1" lang="en-US" altLang="ja-JP" dirty="0"/>
               <a:t>4 </a:t>
             </a:r>
             <a:r>
-              <a:rPr kumimoji="1" lang="ja-JP" altLang="en-US"/>
+              <a:rPr kumimoji="1" lang="ja-JP" altLang="en-US" dirty="0"/>
               <a:t>レベル</a:t>
             </a:r>
           </a:p>
           <a:p>
             <a:pPr lvl="4"/>
             <a:r>
-              <a:rPr kumimoji="1" lang="ja-JP" altLang="en-US"/>
+              <a:rPr kumimoji="1" lang="ja-JP" altLang="en-US" dirty="0"/>
               <a:t>第 </a:t>
             </a:r>
             <a:r>
-              <a:rPr kumimoji="1" lang="en-US" altLang="ja-JP"/>
+              <a:rPr kumimoji="1" lang="en-US" altLang="ja-JP" dirty="0"/>
               <a:t>5 </a:t>
             </a:r>
             <a:r>
-              <a:rPr kumimoji="1" lang="ja-JP" altLang="en-US"/>
+              <a:rPr kumimoji="1" lang="ja-JP" altLang="en-US" dirty="0"/>
               <a:t>レベル</a:t>
             </a:r>
-          </a:p>
-        </p:txBody>
-      </p:sp>
-      <p:sp>
-        <p:nvSpPr>
-          <p:cNvPr id="4" name="日付プレースホルダー 3">
-            <a:extLst>
-              <a:ext uri="{FF2B5EF4-FFF2-40B4-BE49-F238E27FC236}">
-                <a16:creationId xmlns:a16="http://schemas.microsoft.com/office/drawing/2014/main" id="{311DBD3B-56FD-917A-7F5A-3015D9774F18}"/>
-              </a:ext>
-            </a:extLst>
-          </p:cNvPr>
-          <p:cNvSpPr>
-            <a:spLocks noGrp="1"/>
-          </p:cNvSpPr>
-          <p:nvPr>
-            <p:ph type="dt" sz="half" idx="10"/>
-          </p:nvPr>
-        </p:nvSpPr>
-        <p:spPr/>
-        <p:txBody>
-          <a:bodyPr/>
-          <a:lstStyle/>
-          <a:p>
-            <a:fld id="{E3EFBC31-9ECA-48C0-910F-E09377915FB8}" type="datetimeFigureOut">
-              <a:rPr kumimoji="1" lang="ja-JP" altLang="en-US" smtClean="0"/>
-              <a:t>2026/7/5</a:t>
-            </a:fld>
-            <a:endParaRPr kumimoji="1" lang="ja-JP" altLang="en-US"/>
-          </a:p>
-        </p:txBody>
-      </p:sp>
-      <p:sp>
-        <p:nvSpPr>
-          <p:cNvPr id="5" name="フッター プレースホルダー 4">
-            <a:extLst>
-              <a:ext uri="{FF2B5EF4-FFF2-40B4-BE49-F238E27FC236}">
-                <a16:creationId xmlns:a16="http://schemas.microsoft.com/office/drawing/2014/main" id="{8F2DC64E-F29E-D854-BEF0-3070C545D5CA}"/>
-              </a:ext>
-            </a:extLst>
-          </p:cNvPr>
-          <p:cNvSpPr>
-            <a:spLocks noGrp="1"/>
-          </p:cNvSpPr>
-          <p:nvPr>
-            <p:ph type="ftr" sz="quarter" idx="11"/>
-          </p:nvPr>
-        </p:nvSpPr>
-        <p:spPr/>
-        <p:txBody>
-          <a:bodyPr/>
-          <a:lstStyle/>
-          <a:p>
-            <a:endParaRPr kumimoji="1" lang="ja-JP" altLang="en-US"/>
-          </a:p>
-        </p:txBody>
-      </p:sp>
-      <p:sp>
-        <p:nvSpPr>
-          <p:cNvPr id="6" name="スライド番号プレースホルダー 5">
-            <a:extLst>
-              <a:ext uri="{FF2B5EF4-FFF2-40B4-BE49-F238E27FC236}">
-                <a16:creationId xmlns:a16="http://schemas.microsoft.com/office/drawing/2014/main" id="{7548F59C-A5D5-E9EE-6BFB-1E812ECDBA45}"/>
-              </a:ext>
-            </a:extLst>
-          </p:cNvPr>
-          <p:cNvSpPr>
-            <a:spLocks noGrp="1"/>
-          </p:cNvSpPr>
-          <p:nvPr>
-            <p:ph type="sldNum" sz="quarter" idx="12"/>
-          </p:nvPr>
-        </p:nvSpPr>
-        <p:spPr/>
-        <p:txBody>
-          <a:bodyPr/>
-          <a:lstStyle/>
-          <a:p>
-            <a:fld id="{9EBFBC76-F46F-4ADD-8228-9529630895ED}" type="slidenum">
-              <a:rPr kumimoji="1" lang="ja-JP" altLang="en-US" smtClean="0"/>
-              <a:t>‹#›</a:t>
-            </a:fld>
-            <a:endParaRPr kumimoji="1" lang="ja-JP" altLang="en-US"/>
           </a:p>
         </p:txBody>
       </p:sp>
@@ -5607,226 +5626,6 @@
       </p:grpSp>
       <p:sp>
         <p:nvSpPr>
-          <p:cNvPr id="69" name="タイトル 1">
-            <a:extLst>
-              <a:ext uri="{FF2B5EF4-FFF2-40B4-BE49-F238E27FC236}">
-                <a16:creationId xmlns:a16="http://schemas.microsoft.com/office/drawing/2014/main" id="{6CE14998-7D64-A6FD-4F75-ED0C41225FF2}"/>
-              </a:ext>
-            </a:extLst>
-          </p:cNvPr>
-          <p:cNvSpPr txBox="1">
-            <a:spLocks/>
-          </p:cNvSpPr>
-          <p:nvPr/>
-        </p:nvSpPr>
-        <p:spPr>
-          <a:xfrm>
-            <a:off x="370800" y="334800"/>
-            <a:ext cx="11448000" cy="396000"/>
-          </a:xfrm>
-          <a:prstGeom prst="rect">
-            <a:avLst/>
-          </a:prstGeom>
-        </p:spPr>
-        <p:txBody>
-          <a:bodyPr vert="horz" lIns="0" tIns="0" rIns="0" bIns="0" rtlCol="0" anchor="t" anchorCtr="0">
-            <a:noAutofit/>
-          </a:bodyPr>
-          <a:lstStyle>
-            <a:lvl1pPr algn="l" defTabSz="609555" rtl="0" eaLnBrk="1" fontAlgn="base" hangingPunct="1">
-              <a:spcBef>
-                <a:spcPct val="0"/>
-              </a:spcBef>
-              <a:spcAft>
-                <a:spcPct val="0"/>
-              </a:spcAft>
-              <a:defRPr kumimoji="1" sz="2600" b="1" i="0" kern="1200" spc="0" baseline="0">
-                <a:solidFill>
-                  <a:schemeClr val="accent1"/>
-                </a:solidFill>
-                <a:latin typeface="+mj-ea"/>
-                <a:ea typeface="+mj-ea"/>
-                <a:cs typeface="HGPGothicE" charset="-128"/>
-              </a:defRPr>
-            </a:lvl1pPr>
-            <a:lvl2pPr algn="l" defTabSz="609555" rtl="0" eaLnBrk="1" fontAlgn="base" hangingPunct="1">
-              <a:spcBef>
-                <a:spcPct val="0"/>
-              </a:spcBef>
-              <a:spcAft>
-                <a:spcPct val="0"/>
-              </a:spcAft>
-              <a:defRPr kumimoji="1" sz="2667">
-                <a:solidFill>
-                  <a:schemeClr val="tx1"/>
-                </a:solidFill>
-                <a:latin typeface="Arial" pitchFamily="34" charset="0"/>
-                <a:ea typeface="HGP創英角ｺﾞｼｯｸUB"/>
-                <a:cs typeface="Arial" pitchFamily="34" charset="0"/>
-              </a:defRPr>
-            </a:lvl2pPr>
-            <a:lvl3pPr algn="l" defTabSz="609555" rtl="0" eaLnBrk="1" fontAlgn="base" hangingPunct="1">
-              <a:spcBef>
-                <a:spcPct val="0"/>
-              </a:spcBef>
-              <a:spcAft>
-                <a:spcPct val="0"/>
-              </a:spcAft>
-              <a:defRPr kumimoji="1" sz="2667">
-                <a:solidFill>
-                  <a:schemeClr val="tx1"/>
-                </a:solidFill>
-                <a:latin typeface="Arial" pitchFamily="34" charset="0"/>
-                <a:ea typeface="HGP創英角ｺﾞｼｯｸUB"/>
-                <a:cs typeface="Arial" pitchFamily="34" charset="0"/>
-              </a:defRPr>
-            </a:lvl3pPr>
-            <a:lvl4pPr algn="l" defTabSz="609555" rtl="0" eaLnBrk="1" fontAlgn="base" hangingPunct="1">
-              <a:spcBef>
-                <a:spcPct val="0"/>
-              </a:spcBef>
-              <a:spcAft>
-                <a:spcPct val="0"/>
-              </a:spcAft>
-              <a:defRPr kumimoji="1" sz="2667">
-                <a:solidFill>
-                  <a:schemeClr val="tx1"/>
-                </a:solidFill>
-                <a:latin typeface="Arial" pitchFamily="34" charset="0"/>
-                <a:ea typeface="HGP創英角ｺﾞｼｯｸUB"/>
-                <a:cs typeface="Arial" pitchFamily="34" charset="0"/>
-              </a:defRPr>
-            </a:lvl4pPr>
-            <a:lvl5pPr algn="l" defTabSz="609555" rtl="0" eaLnBrk="1" fontAlgn="base" hangingPunct="1">
-              <a:spcBef>
-                <a:spcPct val="0"/>
-              </a:spcBef>
-              <a:spcAft>
-                <a:spcPct val="0"/>
-              </a:spcAft>
-              <a:defRPr kumimoji="1" sz="2667">
-                <a:solidFill>
-                  <a:schemeClr val="tx1"/>
-                </a:solidFill>
-                <a:latin typeface="Arial" pitchFamily="34" charset="0"/>
-                <a:ea typeface="HGP創英角ｺﾞｼｯｸUB"/>
-                <a:cs typeface="Arial" pitchFamily="34" charset="0"/>
-              </a:defRPr>
-            </a:lvl5pPr>
-            <a:lvl6pPr marL="609555" algn="l" defTabSz="609555" rtl="0" eaLnBrk="1" fontAlgn="base" hangingPunct="1">
-              <a:spcBef>
-                <a:spcPct val="0"/>
-              </a:spcBef>
-              <a:spcAft>
-                <a:spcPct val="0"/>
-              </a:spcAft>
-              <a:defRPr kumimoji="1" sz="2667">
-                <a:solidFill>
-                  <a:schemeClr val="tx1"/>
-                </a:solidFill>
-                <a:latin typeface="Arial" pitchFamily="34" charset="0"/>
-                <a:ea typeface="HGP創英角ｺﾞｼｯｸUB"/>
-                <a:cs typeface="Arial" pitchFamily="34" charset="0"/>
-              </a:defRPr>
-            </a:lvl6pPr>
-            <a:lvl7pPr marL="1219110" algn="l" defTabSz="609555" rtl="0" eaLnBrk="1" fontAlgn="base" hangingPunct="1">
-              <a:spcBef>
-                <a:spcPct val="0"/>
-              </a:spcBef>
-              <a:spcAft>
-                <a:spcPct val="0"/>
-              </a:spcAft>
-              <a:defRPr kumimoji="1" sz="2667">
-                <a:solidFill>
-                  <a:schemeClr val="tx1"/>
-                </a:solidFill>
-                <a:latin typeface="Arial" pitchFamily="34" charset="0"/>
-                <a:ea typeface="HGP創英角ｺﾞｼｯｸUB"/>
-                <a:cs typeface="Arial" pitchFamily="34" charset="0"/>
-              </a:defRPr>
-            </a:lvl7pPr>
-            <a:lvl8pPr marL="1828664" algn="l" defTabSz="609555" rtl="0" eaLnBrk="1" fontAlgn="base" hangingPunct="1">
-              <a:spcBef>
-                <a:spcPct val="0"/>
-              </a:spcBef>
-              <a:spcAft>
-                <a:spcPct val="0"/>
-              </a:spcAft>
-              <a:defRPr kumimoji="1" sz="2667">
-                <a:solidFill>
-                  <a:schemeClr val="tx1"/>
-                </a:solidFill>
-                <a:latin typeface="Arial" pitchFamily="34" charset="0"/>
-                <a:ea typeface="HGP創英角ｺﾞｼｯｸUB"/>
-                <a:cs typeface="Arial" pitchFamily="34" charset="0"/>
-              </a:defRPr>
-            </a:lvl8pPr>
-            <a:lvl9pPr marL="2438218" algn="l" defTabSz="609555" rtl="0" eaLnBrk="1" fontAlgn="base" hangingPunct="1">
-              <a:spcBef>
-                <a:spcPct val="0"/>
-              </a:spcBef>
-              <a:spcAft>
-                <a:spcPct val="0"/>
-              </a:spcAft>
-              <a:defRPr kumimoji="1" sz="2667">
-                <a:solidFill>
-                  <a:schemeClr val="tx1"/>
-                </a:solidFill>
-                <a:latin typeface="Arial" pitchFamily="34" charset="0"/>
-                <a:ea typeface="HGP創英角ｺﾞｼｯｸUB"/>
-                <a:cs typeface="Arial" pitchFamily="34" charset="0"/>
-              </a:defRPr>
-            </a:lvl9pPr>
-          </a:lstStyle>
-          <a:p>
-            <a:pPr marL="0" marR="0" lvl="0" indent="0" algn="l" defTabSz="609555" rtl="0" eaLnBrk="1" fontAlgn="base" latinLnBrk="0" hangingPunct="1">
-              <a:lnSpc>
-                <a:spcPct val="100000"/>
-              </a:lnSpc>
-              <a:spcBef>
-                <a:spcPct val="0"/>
-              </a:spcBef>
-              <a:spcAft>
-                <a:spcPct val="0"/>
-              </a:spcAft>
-              <a:buClrTx/>
-              <a:buSzTx/>
-              <a:buFontTx/>
-              <a:buNone/>
-              <a:tabLst/>
-              <a:defRPr/>
-            </a:pPr>
-            <a:r>
-              <a:rPr lang="ja-JP" altLang="en-US" dirty="0">
-                <a:solidFill>
-                  <a:srgbClr val="070F26"/>
-                </a:solidFill>
-                <a:latin typeface="Meiryo UI"/>
-                <a:ea typeface="Meiryo UI"/>
-              </a:rPr>
-              <a:t>研修</a:t>
-            </a:r>
-            <a:r>
-              <a:rPr kumimoji="1" lang="ja-JP" altLang="en-US" sz="2600" b="1" i="0" u="none" strike="noStrike" kern="1200" cap="none" spc="0" normalizeH="0" baseline="0" noProof="0" dirty="0">
-                <a:ln>
-                  <a:noFill/>
-                </a:ln>
-                <a:solidFill>
-                  <a:srgbClr val="070F26"/>
-                </a:solidFill>
-                <a:effectLst/>
-                <a:uLnTx/>
-                <a:uFillTx/>
-                <a:latin typeface="Meiryo UI"/>
-                <a:ea typeface="Meiryo UI"/>
-              </a:rPr>
-              <a:t>の全体像について</a:t>
-            </a:r>
-          </a:p>
-        </p:txBody>
-      </p:sp>
-      <p:sp>
-        <p:nvSpPr>
           <p:cNvPr id="72" name="矢印: 下 71">
             <a:extLst>
               <a:ext uri="{FF2B5EF4-FFF2-40B4-BE49-F238E27FC236}">
@@ -7979,6 +7778,41 @@
           </a:p>
         </p:txBody>
       </p:sp>
+      <p:sp>
+        <p:nvSpPr>
+          <p:cNvPr id="2" name="タイトル 1">
+            <a:extLst>
+              <a:ext uri="{FF2B5EF4-FFF2-40B4-BE49-F238E27FC236}">
+                <a16:creationId xmlns:a16="http://schemas.microsoft.com/office/drawing/2014/main" id="{BFF7F5B0-B4A6-342F-7730-A5338F9BE799}"/>
+              </a:ext>
+            </a:extLst>
+          </p:cNvPr>
+          <p:cNvSpPr>
+            <a:spLocks noGrp="1"/>
+          </p:cNvSpPr>
+          <p:nvPr>
+            <p:ph type="title"/>
+          </p:nvPr>
+        </p:nvSpPr>
+        <p:spPr>
+          <a:xfrm>
+            <a:off x="167951" y="365124"/>
+            <a:ext cx="11877869" cy="540000"/>
+          </a:xfrm>
+        </p:spPr>
+        <p:txBody>
+          <a:bodyPr>
+            <a:normAutofit/>
+          </a:bodyPr>
+          <a:lstStyle/>
+          <a:p>
+            <a:r>
+              <a:rPr lang="ja-JP" altLang="en-US" dirty="0"/>
+              <a:t>研修の全体像について</a:t>
+            </a:r>
+          </a:p>
+        </p:txBody>
+      </p:sp>
     </p:spTree>
     <p:extLst>
       <p:ext uri="{BB962C8B-B14F-4D97-AF65-F5344CB8AC3E}">
@@ -8017,220 +7851,35 @@
       </p:grpSpPr>
       <p:sp>
         <p:nvSpPr>
-          <p:cNvPr id="69" name="タイトル 1">
-            <a:extLst>
-              <a:ext uri="{FF2B5EF4-FFF2-40B4-BE49-F238E27FC236}">
-                <a16:creationId xmlns:a16="http://schemas.microsoft.com/office/drawing/2014/main" id="{144B32AA-85C2-BD46-C735-DB9104F39391}"/>
-              </a:ext>
-            </a:extLst>
-          </p:cNvPr>
-          <p:cNvSpPr txBox="1">
-            <a:spLocks/>
+          <p:cNvPr id="5" name="タイトル 4">
+            <a:extLst>
+              <a:ext uri="{FF2B5EF4-FFF2-40B4-BE49-F238E27FC236}">
+                <a16:creationId xmlns:a16="http://schemas.microsoft.com/office/drawing/2014/main" id="{4EC78105-EA3B-F9EC-6535-CCC9F6446705}"/>
+              </a:ext>
+            </a:extLst>
+          </p:cNvPr>
+          <p:cNvSpPr>
+            <a:spLocks noGrp="1"/>
           </p:cNvSpPr>
-          <p:nvPr/>
+          <p:nvPr>
+            <p:ph type="title"/>
+          </p:nvPr>
         </p:nvSpPr>
         <p:spPr>
           <a:xfrm>
-            <a:off x="370800" y="334800"/>
-            <a:ext cx="11448000" cy="396000"/>
+            <a:off x="167951" y="365124"/>
+            <a:ext cx="11877869" cy="540000"/>
           </a:xfrm>
-          <a:prstGeom prst="rect">
-            <a:avLst/>
-          </a:prstGeom>
         </p:spPr>
         <p:txBody>
-          <a:bodyPr vert="horz" lIns="0" tIns="0" rIns="0" bIns="0" rtlCol="0" anchor="t" anchorCtr="0">
-            <a:noAutofit/>
+          <a:bodyPr>
+            <a:normAutofit/>
           </a:bodyPr>
-          <a:lstStyle>
-            <a:lvl1pPr algn="l" defTabSz="609555" rtl="0" eaLnBrk="1" fontAlgn="base" hangingPunct="1">
-              <a:spcBef>
-                <a:spcPct val="0"/>
-              </a:spcBef>
-              <a:spcAft>
-                <a:spcPct val="0"/>
-              </a:spcAft>
-              <a:defRPr kumimoji="1" sz="2600" b="1" i="0" kern="1200" spc="0" baseline="0">
-                <a:solidFill>
-                  <a:schemeClr val="accent1"/>
-                </a:solidFill>
-                <a:latin typeface="+mj-ea"/>
-                <a:ea typeface="+mj-ea"/>
-                <a:cs typeface="HGPGothicE" charset="-128"/>
-              </a:defRPr>
-            </a:lvl1pPr>
-            <a:lvl2pPr algn="l" defTabSz="609555" rtl="0" eaLnBrk="1" fontAlgn="base" hangingPunct="1">
-              <a:spcBef>
-                <a:spcPct val="0"/>
-              </a:spcBef>
-              <a:spcAft>
-                <a:spcPct val="0"/>
-              </a:spcAft>
-              <a:defRPr kumimoji="1" sz="2667">
-                <a:solidFill>
-                  <a:schemeClr val="tx1"/>
-                </a:solidFill>
-                <a:latin typeface="Arial" pitchFamily="34" charset="0"/>
-                <a:ea typeface="HGP創英角ｺﾞｼｯｸUB"/>
-                <a:cs typeface="Arial" pitchFamily="34" charset="0"/>
-              </a:defRPr>
-            </a:lvl2pPr>
-            <a:lvl3pPr algn="l" defTabSz="609555" rtl="0" eaLnBrk="1" fontAlgn="base" hangingPunct="1">
-              <a:spcBef>
-                <a:spcPct val="0"/>
-              </a:spcBef>
-              <a:spcAft>
-                <a:spcPct val="0"/>
-              </a:spcAft>
-              <a:defRPr kumimoji="1" sz="2667">
-                <a:solidFill>
-                  <a:schemeClr val="tx1"/>
-                </a:solidFill>
-                <a:latin typeface="Arial" pitchFamily="34" charset="0"/>
-                <a:ea typeface="HGP創英角ｺﾞｼｯｸUB"/>
-                <a:cs typeface="Arial" pitchFamily="34" charset="0"/>
-              </a:defRPr>
-            </a:lvl3pPr>
-            <a:lvl4pPr algn="l" defTabSz="609555" rtl="0" eaLnBrk="1" fontAlgn="base" hangingPunct="1">
-              <a:spcBef>
-                <a:spcPct val="0"/>
-              </a:spcBef>
-              <a:spcAft>
-                <a:spcPct val="0"/>
-              </a:spcAft>
-              <a:defRPr kumimoji="1" sz="2667">
-                <a:solidFill>
-                  <a:schemeClr val="tx1"/>
-                </a:solidFill>
-                <a:latin typeface="Arial" pitchFamily="34" charset="0"/>
-                <a:ea typeface="HGP創英角ｺﾞｼｯｸUB"/>
-                <a:cs typeface="Arial" pitchFamily="34" charset="0"/>
-              </a:defRPr>
-            </a:lvl4pPr>
-            <a:lvl5pPr algn="l" defTabSz="609555" rtl="0" eaLnBrk="1" fontAlgn="base" hangingPunct="1">
-              <a:spcBef>
-                <a:spcPct val="0"/>
-              </a:spcBef>
-              <a:spcAft>
-                <a:spcPct val="0"/>
-              </a:spcAft>
-              <a:defRPr kumimoji="1" sz="2667">
-                <a:solidFill>
-                  <a:schemeClr val="tx1"/>
-                </a:solidFill>
-                <a:latin typeface="Arial" pitchFamily="34" charset="0"/>
-                <a:ea typeface="HGP創英角ｺﾞｼｯｸUB"/>
-                <a:cs typeface="Arial" pitchFamily="34" charset="0"/>
-              </a:defRPr>
-            </a:lvl5pPr>
-            <a:lvl6pPr marL="609555" algn="l" defTabSz="609555" rtl="0" eaLnBrk="1" fontAlgn="base" hangingPunct="1">
-              <a:spcBef>
-                <a:spcPct val="0"/>
-              </a:spcBef>
-              <a:spcAft>
-                <a:spcPct val="0"/>
-              </a:spcAft>
-              <a:defRPr kumimoji="1" sz="2667">
-                <a:solidFill>
-                  <a:schemeClr val="tx1"/>
-                </a:solidFill>
-                <a:latin typeface="Arial" pitchFamily="34" charset="0"/>
-                <a:ea typeface="HGP創英角ｺﾞｼｯｸUB"/>
-                <a:cs typeface="Arial" pitchFamily="34" charset="0"/>
-              </a:defRPr>
-            </a:lvl6pPr>
-            <a:lvl7pPr marL="1219110" algn="l" defTabSz="609555" rtl="0" eaLnBrk="1" fontAlgn="base" hangingPunct="1">
-              <a:spcBef>
-                <a:spcPct val="0"/>
-              </a:spcBef>
-              <a:spcAft>
-                <a:spcPct val="0"/>
-              </a:spcAft>
-              <a:defRPr kumimoji="1" sz="2667">
-                <a:solidFill>
-                  <a:schemeClr val="tx1"/>
-                </a:solidFill>
-                <a:latin typeface="Arial" pitchFamily="34" charset="0"/>
-                <a:ea typeface="HGP創英角ｺﾞｼｯｸUB"/>
-                <a:cs typeface="Arial" pitchFamily="34" charset="0"/>
-              </a:defRPr>
-            </a:lvl7pPr>
-            <a:lvl8pPr marL="1828664" algn="l" defTabSz="609555" rtl="0" eaLnBrk="1" fontAlgn="base" hangingPunct="1">
-              <a:spcBef>
-                <a:spcPct val="0"/>
-              </a:spcBef>
-              <a:spcAft>
-                <a:spcPct val="0"/>
-              </a:spcAft>
-              <a:defRPr kumimoji="1" sz="2667">
-                <a:solidFill>
-                  <a:schemeClr val="tx1"/>
-                </a:solidFill>
-                <a:latin typeface="Arial" pitchFamily="34" charset="0"/>
-                <a:ea typeface="HGP創英角ｺﾞｼｯｸUB"/>
-                <a:cs typeface="Arial" pitchFamily="34" charset="0"/>
-              </a:defRPr>
-            </a:lvl8pPr>
-            <a:lvl9pPr marL="2438218" algn="l" defTabSz="609555" rtl="0" eaLnBrk="1" fontAlgn="base" hangingPunct="1">
-              <a:spcBef>
-                <a:spcPct val="0"/>
-              </a:spcBef>
-              <a:spcAft>
-                <a:spcPct val="0"/>
-              </a:spcAft>
-              <a:defRPr kumimoji="1" sz="2667">
-                <a:solidFill>
-                  <a:schemeClr val="tx1"/>
-                </a:solidFill>
-                <a:latin typeface="Arial" pitchFamily="34" charset="0"/>
-                <a:ea typeface="HGP創英角ｺﾞｼｯｸUB"/>
-                <a:cs typeface="Arial" pitchFamily="34" charset="0"/>
-              </a:defRPr>
-            </a:lvl9pPr>
-          </a:lstStyle>
-          <a:p>
-            <a:pPr marL="0" marR="0" lvl="0" indent="0" algn="l" defTabSz="609555" rtl="0" eaLnBrk="1" fontAlgn="base" latinLnBrk="0" hangingPunct="1">
-              <a:lnSpc>
-                <a:spcPct val="100000"/>
-              </a:lnSpc>
-              <a:spcBef>
-                <a:spcPct val="0"/>
-              </a:spcBef>
-              <a:spcAft>
-                <a:spcPct val="0"/>
-              </a:spcAft>
-              <a:buClrTx/>
-              <a:buSzTx/>
-              <a:buFontTx/>
-              <a:buNone/>
-              <a:tabLst/>
-              <a:defRPr/>
-            </a:pPr>
-            <a:r>
-              <a:rPr lang="ja-JP" altLang="en-US" dirty="0">
-                <a:solidFill>
-                  <a:srgbClr val="070F26"/>
-                </a:solidFill>
-                <a:latin typeface="Meiryo UI"/>
-                <a:ea typeface="Meiryo UI"/>
-              </a:rPr>
-              <a:t>提案資料</a:t>
-            </a:r>
-            <a:r>
-              <a:rPr kumimoji="1" lang="ja-JP" altLang="en-US" sz="2600" b="1" i="0" u="none" strike="noStrike" kern="1200" cap="none" spc="0" normalizeH="0" baseline="0" noProof="0" dirty="0">
-                <a:ln>
-                  <a:noFill/>
-                </a:ln>
-                <a:solidFill>
-                  <a:srgbClr val="070F26"/>
-                </a:solidFill>
-                <a:effectLst/>
-                <a:uLnTx/>
-                <a:uFillTx/>
-                <a:latin typeface="Meiryo UI"/>
-                <a:ea typeface="Meiryo UI"/>
-              </a:rPr>
-              <a:t>について</a:t>
+          <a:lstStyle/>
+          <a:p>
+            <a:r>
+              <a:rPr lang="ja-JP" altLang="en-US" dirty="0"/>
+              <a:t>提案資料について</a:t>
             </a:r>
           </a:p>
         </p:txBody>
@@ -8253,8 +7902,8 @@
         </p:nvSpPr>
         <p:spPr>
           <a:xfrm>
-            <a:off x="838200" y="914400"/>
-            <a:ext cx="7920000" cy="5242685"/>
+            <a:off x="167951" y="1073020"/>
+            <a:ext cx="11877869" cy="5103943"/>
           </a:xfrm>
         </p:spPr>
         <p:txBody>
@@ -8457,9 +8106,6 @@
             </a:r>
           </a:p>
           <a:p>
-            <a:pPr marL="0" indent="0">
-              <a:buNone/>
-            </a:pPr>
             <a:endParaRPr lang="en-US" altLang="ja-JP" dirty="0"/>
           </a:p>
           <a:p>
@@ -8546,211 +8192,38 @@
       </p:grpSpPr>
       <p:sp>
         <p:nvSpPr>
-          <p:cNvPr id="69" name="タイトル 1">
-            <a:extLst>
-              <a:ext uri="{FF2B5EF4-FFF2-40B4-BE49-F238E27FC236}">
-                <a16:creationId xmlns:a16="http://schemas.microsoft.com/office/drawing/2014/main" id="{13691081-A195-E07D-931A-B6B77EFCA795}"/>
-              </a:ext>
-            </a:extLst>
-          </p:cNvPr>
-          <p:cNvSpPr txBox="1">
-            <a:spLocks/>
+          <p:cNvPr id="5" name="タイトル 4">
+            <a:extLst>
+              <a:ext uri="{FF2B5EF4-FFF2-40B4-BE49-F238E27FC236}">
+                <a16:creationId xmlns:a16="http://schemas.microsoft.com/office/drawing/2014/main" id="{1C28216E-658E-69ED-8984-F49F548D1195}"/>
+              </a:ext>
+            </a:extLst>
+          </p:cNvPr>
+          <p:cNvSpPr>
+            <a:spLocks noGrp="1"/>
           </p:cNvSpPr>
-          <p:nvPr/>
-        </p:nvSpPr>
-        <p:spPr>
-          <a:xfrm>
-            <a:off x="370800" y="334800"/>
-            <a:ext cx="11448000" cy="396000"/>
-          </a:xfrm>
-          <a:prstGeom prst="rect">
-            <a:avLst/>
-          </a:prstGeom>
-        </p:spPr>
-        <p:txBody>
-          <a:bodyPr vert="horz" lIns="0" tIns="0" rIns="0" bIns="0" rtlCol="0" anchor="t" anchorCtr="0">
-            <a:noAutofit/>
+          <p:nvPr>
+            <p:ph type="title"/>
+          </p:nvPr>
+        </p:nvSpPr>
+        <p:spPr/>
+        <p:txBody>
+          <a:bodyPr>
+            <a:normAutofit/>
           </a:bodyPr>
-          <a:lstStyle>
-            <a:lvl1pPr algn="l" defTabSz="609555" rtl="0" eaLnBrk="1" fontAlgn="base" hangingPunct="1">
-              <a:spcBef>
-                <a:spcPct val="0"/>
-              </a:spcBef>
-              <a:spcAft>
-                <a:spcPct val="0"/>
-              </a:spcAft>
-              <a:defRPr kumimoji="1" sz="2600" b="1" i="0" kern="1200" spc="0" baseline="0">
-                <a:solidFill>
-                  <a:schemeClr val="accent1"/>
-                </a:solidFill>
-                <a:latin typeface="+mj-ea"/>
-                <a:ea typeface="+mj-ea"/>
-                <a:cs typeface="HGPGothicE" charset="-128"/>
-              </a:defRPr>
-            </a:lvl1pPr>
-            <a:lvl2pPr algn="l" defTabSz="609555" rtl="0" eaLnBrk="1" fontAlgn="base" hangingPunct="1">
-              <a:spcBef>
-                <a:spcPct val="0"/>
-              </a:spcBef>
-              <a:spcAft>
-                <a:spcPct val="0"/>
-              </a:spcAft>
-              <a:defRPr kumimoji="1" sz="2667">
-                <a:solidFill>
-                  <a:schemeClr val="tx1"/>
-                </a:solidFill>
-                <a:latin typeface="Arial" pitchFamily="34" charset="0"/>
-                <a:ea typeface="HGP創英角ｺﾞｼｯｸUB"/>
-                <a:cs typeface="Arial" pitchFamily="34" charset="0"/>
-              </a:defRPr>
-            </a:lvl2pPr>
-            <a:lvl3pPr algn="l" defTabSz="609555" rtl="0" eaLnBrk="1" fontAlgn="base" hangingPunct="1">
-              <a:spcBef>
-                <a:spcPct val="0"/>
-              </a:spcBef>
-              <a:spcAft>
-                <a:spcPct val="0"/>
-              </a:spcAft>
-              <a:defRPr kumimoji="1" sz="2667">
-                <a:solidFill>
-                  <a:schemeClr val="tx1"/>
-                </a:solidFill>
-                <a:latin typeface="Arial" pitchFamily="34" charset="0"/>
-                <a:ea typeface="HGP創英角ｺﾞｼｯｸUB"/>
-                <a:cs typeface="Arial" pitchFamily="34" charset="0"/>
-              </a:defRPr>
-            </a:lvl3pPr>
-            <a:lvl4pPr algn="l" defTabSz="609555" rtl="0" eaLnBrk="1" fontAlgn="base" hangingPunct="1">
-              <a:spcBef>
-                <a:spcPct val="0"/>
-              </a:spcBef>
-              <a:spcAft>
-                <a:spcPct val="0"/>
-              </a:spcAft>
-              <a:defRPr kumimoji="1" sz="2667">
-                <a:solidFill>
-                  <a:schemeClr val="tx1"/>
-                </a:solidFill>
-                <a:latin typeface="Arial" pitchFamily="34" charset="0"/>
-                <a:ea typeface="HGP創英角ｺﾞｼｯｸUB"/>
-                <a:cs typeface="Arial" pitchFamily="34" charset="0"/>
-              </a:defRPr>
-            </a:lvl4pPr>
-            <a:lvl5pPr algn="l" defTabSz="609555" rtl="0" eaLnBrk="1" fontAlgn="base" hangingPunct="1">
-              <a:spcBef>
-                <a:spcPct val="0"/>
-              </a:spcBef>
-              <a:spcAft>
-                <a:spcPct val="0"/>
-              </a:spcAft>
-              <a:defRPr kumimoji="1" sz="2667">
-                <a:solidFill>
-                  <a:schemeClr val="tx1"/>
-                </a:solidFill>
-                <a:latin typeface="Arial" pitchFamily="34" charset="0"/>
-                <a:ea typeface="HGP創英角ｺﾞｼｯｸUB"/>
-                <a:cs typeface="Arial" pitchFamily="34" charset="0"/>
-              </a:defRPr>
-            </a:lvl5pPr>
-            <a:lvl6pPr marL="609555" algn="l" defTabSz="609555" rtl="0" eaLnBrk="1" fontAlgn="base" hangingPunct="1">
-              <a:spcBef>
-                <a:spcPct val="0"/>
-              </a:spcBef>
-              <a:spcAft>
-                <a:spcPct val="0"/>
-              </a:spcAft>
-              <a:defRPr kumimoji="1" sz="2667">
-                <a:solidFill>
-                  <a:schemeClr val="tx1"/>
-                </a:solidFill>
-                <a:latin typeface="Arial" pitchFamily="34" charset="0"/>
-                <a:ea typeface="HGP創英角ｺﾞｼｯｸUB"/>
-                <a:cs typeface="Arial" pitchFamily="34" charset="0"/>
-              </a:defRPr>
-            </a:lvl6pPr>
-            <a:lvl7pPr marL="1219110" algn="l" defTabSz="609555" rtl="0" eaLnBrk="1" fontAlgn="base" hangingPunct="1">
-              <a:spcBef>
-                <a:spcPct val="0"/>
-              </a:spcBef>
-              <a:spcAft>
-                <a:spcPct val="0"/>
-              </a:spcAft>
-              <a:defRPr kumimoji="1" sz="2667">
-                <a:solidFill>
-                  <a:schemeClr val="tx1"/>
-                </a:solidFill>
-                <a:latin typeface="Arial" pitchFamily="34" charset="0"/>
-                <a:ea typeface="HGP創英角ｺﾞｼｯｸUB"/>
-                <a:cs typeface="Arial" pitchFamily="34" charset="0"/>
-              </a:defRPr>
-            </a:lvl7pPr>
-            <a:lvl8pPr marL="1828664" algn="l" defTabSz="609555" rtl="0" eaLnBrk="1" fontAlgn="base" hangingPunct="1">
-              <a:spcBef>
-                <a:spcPct val="0"/>
-              </a:spcBef>
-              <a:spcAft>
-                <a:spcPct val="0"/>
-              </a:spcAft>
-              <a:defRPr kumimoji="1" sz="2667">
-                <a:solidFill>
-                  <a:schemeClr val="tx1"/>
-                </a:solidFill>
-                <a:latin typeface="Arial" pitchFamily="34" charset="0"/>
-                <a:ea typeface="HGP創英角ｺﾞｼｯｸUB"/>
-                <a:cs typeface="Arial" pitchFamily="34" charset="0"/>
-              </a:defRPr>
-            </a:lvl8pPr>
-            <a:lvl9pPr marL="2438218" algn="l" defTabSz="609555" rtl="0" eaLnBrk="1" fontAlgn="base" hangingPunct="1">
-              <a:spcBef>
-                <a:spcPct val="0"/>
-              </a:spcBef>
-              <a:spcAft>
-                <a:spcPct val="0"/>
-              </a:spcAft>
-              <a:defRPr kumimoji="1" sz="2667">
-                <a:solidFill>
-                  <a:schemeClr val="tx1"/>
-                </a:solidFill>
-                <a:latin typeface="Arial" pitchFamily="34" charset="0"/>
-                <a:ea typeface="HGP創英角ｺﾞｼｯｸUB"/>
-                <a:cs typeface="Arial" pitchFamily="34" charset="0"/>
-              </a:defRPr>
-            </a:lvl9pPr>
-          </a:lstStyle>
-          <a:p>
-            <a:pPr marL="0" marR="0" lvl="0" indent="0" algn="l" defTabSz="609555" rtl="0" eaLnBrk="1" fontAlgn="base" latinLnBrk="0" hangingPunct="1">
-              <a:lnSpc>
-                <a:spcPct val="100000"/>
-              </a:lnSpc>
-              <a:spcBef>
-                <a:spcPct val="0"/>
-              </a:spcBef>
-              <a:spcAft>
-                <a:spcPct val="0"/>
-              </a:spcAft>
-              <a:buClrTx/>
-              <a:buSzTx/>
-              <a:buFontTx/>
-              <a:buNone/>
-              <a:tabLst/>
-              <a:defRPr/>
-            </a:pPr>
-            <a:r>
-              <a:rPr kumimoji="1" lang="ja-JP" altLang="en-US" sz="2600" b="1" i="0" u="none" strike="noStrike" kern="1200" cap="none" spc="0" normalizeH="0" baseline="0" noProof="0" dirty="0">
-                <a:ln>
-                  <a:noFill/>
-                </a:ln>
+          <a:lstStyle/>
+          <a:p>
+            <a:r>
+              <a:rPr lang="ja-JP" altLang="en-US" dirty="0">
                 <a:solidFill>
                   <a:srgbClr val="070F26"/>
                 </a:solidFill>
-                <a:effectLst/>
-                <a:uLnTx/>
-                <a:uFillTx/>
                 <a:latin typeface="Meiryo UI"/>
                 <a:ea typeface="Meiryo UI"/>
               </a:rPr>
               <a:t>提案資料の作成について</a:t>
             </a:r>
+            <a:endParaRPr lang="ja-JP" altLang="en-US" dirty="0"/>
           </a:p>
         </p:txBody>
       </p:sp>
@@ -8772,8 +8245,8 @@
         </p:nvSpPr>
         <p:spPr>
           <a:xfrm>
-            <a:off x="838200" y="914400"/>
-            <a:ext cx="7920000" cy="5242685"/>
+            <a:off x="168275" y="1073150"/>
+            <a:ext cx="11877675" cy="5103813"/>
           </a:xfrm>
         </p:spPr>
         <p:txBody>
@@ -8789,10 +8262,7 @@
             <a:endParaRPr lang="en-US" altLang="ja-JP" dirty="0"/>
           </a:p>
           <a:p>
-            <a:pPr marL="914400" lvl="1" indent="-457200">
-              <a:buFont typeface="+mj-lt"/>
-              <a:buAutoNum type="arabicPeriod"/>
-            </a:pPr>
+            <a:pPr lvl="1"/>
             <a:r>
               <a:rPr lang="ja-JP" altLang="en-US" dirty="0"/>
               <a:t>提案テーマの検討</a:t>
@@ -8808,10 +8278,7 @@
             <a:endParaRPr lang="en-US" altLang="ja-JP" dirty="0"/>
           </a:p>
           <a:p>
-            <a:pPr marL="914400" lvl="1" indent="-457200">
-              <a:buFont typeface="+mj-lt"/>
-              <a:buAutoNum type="arabicPeriod"/>
-            </a:pPr>
+            <a:pPr lvl="1"/>
             <a:r>
               <a:rPr lang="ja-JP" altLang="en-US" dirty="0"/>
               <a:t>提案テーマの意見交換</a:t>
@@ -8827,10 +8294,7 @@
             <a:endParaRPr lang="en-US" altLang="ja-JP" dirty="0"/>
           </a:p>
           <a:p>
-            <a:pPr marL="914400" lvl="1" indent="-457200">
-              <a:buFont typeface="+mj-lt"/>
-              <a:buAutoNum type="arabicPeriod"/>
-            </a:pPr>
+            <a:pPr lvl="1"/>
             <a:r>
               <a:rPr lang="ja-JP" altLang="en-US" dirty="0"/>
               <a:t>提案内容の調査</a:t>
@@ -8854,10 +8318,7 @@
             <a:endParaRPr lang="en-US" altLang="ja-JP" dirty="0"/>
           </a:p>
           <a:p>
-            <a:pPr marL="914400" lvl="1" indent="-457200">
-              <a:buFont typeface="+mj-lt"/>
-              <a:buAutoNum type="arabicPeriod"/>
-            </a:pPr>
+            <a:pPr lvl="1"/>
             <a:r>
               <a:rPr lang="ja-JP" altLang="en-US" dirty="0"/>
               <a:t>提案内容の具体化</a:t>
@@ -8881,10 +8342,7 @@
             <a:endParaRPr lang="en-US" altLang="ja-JP" dirty="0"/>
           </a:p>
           <a:p>
-            <a:pPr marL="914400" lvl="1" indent="-457200">
-              <a:buFont typeface="+mj-lt"/>
-              <a:buAutoNum type="arabicPeriod"/>
-            </a:pPr>
+            <a:pPr lvl="1"/>
             <a:r>
               <a:rPr lang="ja-JP" altLang="en-US" dirty="0"/>
               <a:t>提案資料の作成</a:t>
@@ -8908,10 +8366,7 @@
             <a:endParaRPr lang="en-US" altLang="ja-JP" dirty="0"/>
           </a:p>
           <a:p>
-            <a:pPr marL="914400" lvl="1" indent="-457200">
-              <a:buFont typeface="+mj-lt"/>
-              <a:buAutoNum type="arabicPeriod"/>
-            </a:pPr>
+            <a:pPr lvl="1"/>
             <a:r>
               <a:rPr lang="ja-JP" altLang="en-US" dirty="0"/>
               <a:t>提案資料の提出</a:t>
@@ -8996,211 +8451,38 @@
       </p:grpSpPr>
       <p:sp>
         <p:nvSpPr>
-          <p:cNvPr id="69" name="タイトル 1">
-            <a:extLst>
-              <a:ext uri="{FF2B5EF4-FFF2-40B4-BE49-F238E27FC236}">
-                <a16:creationId xmlns:a16="http://schemas.microsoft.com/office/drawing/2014/main" id="{A748C259-4E8E-05AF-3CA3-8E90D6D3B0FE}"/>
-              </a:ext>
-            </a:extLst>
-          </p:cNvPr>
-          <p:cNvSpPr txBox="1">
-            <a:spLocks/>
+          <p:cNvPr id="5" name="タイトル 4">
+            <a:extLst>
+              <a:ext uri="{FF2B5EF4-FFF2-40B4-BE49-F238E27FC236}">
+                <a16:creationId xmlns:a16="http://schemas.microsoft.com/office/drawing/2014/main" id="{1B2E075E-16F6-2B76-14BC-0CA6B0999948}"/>
+              </a:ext>
+            </a:extLst>
+          </p:cNvPr>
+          <p:cNvSpPr>
+            <a:spLocks noGrp="1"/>
           </p:cNvSpPr>
-          <p:nvPr/>
-        </p:nvSpPr>
-        <p:spPr>
-          <a:xfrm>
-            <a:off x="370800" y="334800"/>
-            <a:ext cx="11448000" cy="396000"/>
-          </a:xfrm>
-          <a:prstGeom prst="rect">
-            <a:avLst/>
-          </a:prstGeom>
-        </p:spPr>
-        <p:txBody>
-          <a:bodyPr vert="horz" lIns="0" tIns="0" rIns="0" bIns="0" rtlCol="0" anchor="t" anchorCtr="0">
-            <a:noAutofit/>
+          <p:nvPr>
+            <p:ph type="title"/>
+          </p:nvPr>
+        </p:nvSpPr>
+        <p:spPr/>
+        <p:txBody>
+          <a:bodyPr>
+            <a:normAutofit/>
           </a:bodyPr>
-          <a:lstStyle>
-            <a:lvl1pPr algn="l" defTabSz="609555" rtl="0" eaLnBrk="1" fontAlgn="base" hangingPunct="1">
-              <a:spcBef>
-                <a:spcPct val="0"/>
-              </a:spcBef>
-              <a:spcAft>
-                <a:spcPct val="0"/>
-              </a:spcAft>
-              <a:defRPr kumimoji="1" sz="2600" b="1" i="0" kern="1200" spc="0" baseline="0">
-                <a:solidFill>
-                  <a:schemeClr val="accent1"/>
-                </a:solidFill>
-                <a:latin typeface="+mj-ea"/>
-                <a:ea typeface="+mj-ea"/>
-                <a:cs typeface="HGPGothicE" charset="-128"/>
-              </a:defRPr>
-            </a:lvl1pPr>
-            <a:lvl2pPr algn="l" defTabSz="609555" rtl="0" eaLnBrk="1" fontAlgn="base" hangingPunct="1">
-              <a:spcBef>
-                <a:spcPct val="0"/>
-              </a:spcBef>
-              <a:spcAft>
-                <a:spcPct val="0"/>
-              </a:spcAft>
-              <a:defRPr kumimoji="1" sz="2667">
-                <a:solidFill>
-                  <a:schemeClr val="tx1"/>
-                </a:solidFill>
-                <a:latin typeface="Arial" pitchFamily="34" charset="0"/>
-                <a:ea typeface="HGP創英角ｺﾞｼｯｸUB"/>
-                <a:cs typeface="Arial" pitchFamily="34" charset="0"/>
-              </a:defRPr>
-            </a:lvl2pPr>
-            <a:lvl3pPr algn="l" defTabSz="609555" rtl="0" eaLnBrk="1" fontAlgn="base" hangingPunct="1">
-              <a:spcBef>
-                <a:spcPct val="0"/>
-              </a:spcBef>
-              <a:spcAft>
-                <a:spcPct val="0"/>
-              </a:spcAft>
-              <a:defRPr kumimoji="1" sz="2667">
-                <a:solidFill>
-                  <a:schemeClr val="tx1"/>
-                </a:solidFill>
-                <a:latin typeface="Arial" pitchFamily="34" charset="0"/>
-                <a:ea typeface="HGP創英角ｺﾞｼｯｸUB"/>
-                <a:cs typeface="Arial" pitchFamily="34" charset="0"/>
-              </a:defRPr>
-            </a:lvl3pPr>
-            <a:lvl4pPr algn="l" defTabSz="609555" rtl="0" eaLnBrk="1" fontAlgn="base" hangingPunct="1">
-              <a:spcBef>
-                <a:spcPct val="0"/>
-              </a:spcBef>
-              <a:spcAft>
-                <a:spcPct val="0"/>
-              </a:spcAft>
-              <a:defRPr kumimoji="1" sz="2667">
-                <a:solidFill>
-                  <a:schemeClr val="tx1"/>
-                </a:solidFill>
-                <a:latin typeface="Arial" pitchFamily="34" charset="0"/>
-                <a:ea typeface="HGP創英角ｺﾞｼｯｸUB"/>
-                <a:cs typeface="Arial" pitchFamily="34" charset="0"/>
-              </a:defRPr>
-            </a:lvl4pPr>
-            <a:lvl5pPr algn="l" defTabSz="609555" rtl="0" eaLnBrk="1" fontAlgn="base" hangingPunct="1">
-              <a:spcBef>
-                <a:spcPct val="0"/>
-              </a:spcBef>
-              <a:spcAft>
-                <a:spcPct val="0"/>
-              </a:spcAft>
-              <a:defRPr kumimoji="1" sz="2667">
-                <a:solidFill>
-                  <a:schemeClr val="tx1"/>
-                </a:solidFill>
-                <a:latin typeface="Arial" pitchFamily="34" charset="0"/>
-                <a:ea typeface="HGP創英角ｺﾞｼｯｸUB"/>
-                <a:cs typeface="Arial" pitchFamily="34" charset="0"/>
-              </a:defRPr>
-            </a:lvl5pPr>
-            <a:lvl6pPr marL="609555" algn="l" defTabSz="609555" rtl="0" eaLnBrk="1" fontAlgn="base" hangingPunct="1">
-              <a:spcBef>
-                <a:spcPct val="0"/>
-              </a:spcBef>
-              <a:spcAft>
-                <a:spcPct val="0"/>
-              </a:spcAft>
-              <a:defRPr kumimoji="1" sz="2667">
-                <a:solidFill>
-                  <a:schemeClr val="tx1"/>
-                </a:solidFill>
-                <a:latin typeface="Arial" pitchFamily="34" charset="0"/>
-                <a:ea typeface="HGP創英角ｺﾞｼｯｸUB"/>
-                <a:cs typeface="Arial" pitchFamily="34" charset="0"/>
-              </a:defRPr>
-            </a:lvl6pPr>
-            <a:lvl7pPr marL="1219110" algn="l" defTabSz="609555" rtl="0" eaLnBrk="1" fontAlgn="base" hangingPunct="1">
-              <a:spcBef>
-                <a:spcPct val="0"/>
-              </a:spcBef>
-              <a:spcAft>
-                <a:spcPct val="0"/>
-              </a:spcAft>
-              <a:defRPr kumimoji="1" sz="2667">
-                <a:solidFill>
-                  <a:schemeClr val="tx1"/>
-                </a:solidFill>
-                <a:latin typeface="Arial" pitchFamily="34" charset="0"/>
-                <a:ea typeface="HGP創英角ｺﾞｼｯｸUB"/>
-                <a:cs typeface="Arial" pitchFamily="34" charset="0"/>
-              </a:defRPr>
-            </a:lvl7pPr>
-            <a:lvl8pPr marL="1828664" algn="l" defTabSz="609555" rtl="0" eaLnBrk="1" fontAlgn="base" hangingPunct="1">
-              <a:spcBef>
-                <a:spcPct val="0"/>
-              </a:spcBef>
-              <a:spcAft>
-                <a:spcPct val="0"/>
-              </a:spcAft>
-              <a:defRPr kumimoji="1" sz="2667">
-                <a:solidFill>
-                  <a:schemeClr val="tx1"/>
-                </a:solidFill>
-                <a:latin typeface="Arial" pitchFamily="34" charset="0"/>
-                <a:ea typeface="HGP創英角ｺﾞｼｯｸUB"/>
-                <a:cs typeface="Arial" pitchFamily="34" charset="0"/>
-              </a:defRPr>
-            </a:lvl8pPr>
-            <a:lvl9pPr marL="2438218" algn="l" defTabSz="609555" rtl="0" eaLnBrk="1" fontAlgn="base" hangingPunct="1">
-              <a:spcBef>
-                <a:spcPct val="0"/>
-              </a:spcBef>
-              <a:spcAft>
-                <a:spcPct val="0"/>
-              </a:spcAft>
-              <a:defRPr kumimoji="1" sz="2667">
-                <a:solidFill>
-                  <a:schemeClr val="tx1"/>
-                </a:solidFill>
-                <a:latin typeface="Arial" pitchFamily="34" charset="0"/>
-                <a:ea typeface="HGP創英角ｺﾞｼｯｸUB"/>
-                <a:cs typeface="Arial" pitchFamily="34" charset="0"/>
-              </a:defRPr>
-            </a:lvl9pPr>
-          </a:lstStyle>
-          <a:p>
-            <a:pPr marL="0" marR="0" lvl="0" indent="0" algn="l" defTabSz="609555" rtl="0" eaLnBrk="1" fontAlgn="base" latinLnBrk="0" hangingPunct="1">
-              <a:lnSpc>
-                <a:spcPct val="100000"/>
-              </a:lnSpc>
-              <a:spcBef>
-                <a:spcPct val="0"/>
-              </a:spcBef>
-              <a:spcAft>
-                <a:spcPct val="0"/>
-              </a:spcAft>
-              <a:buClrTx/>
-              <a:buSzTx/>
-              <a:buFontTx/>
-              <a:buNone/>
-              <a:tabLst/>
-              <a:defRPr/>
-            </a:pPr>
-            <a:r>
-              <a:rPr kumimoji="1" lang="ja-JP" altLang="en-US" sz="2600" b="1" i="0" u="none" strike="noStrike" kern="1200" cap="none" spc="0" normalizeH="0" baseline="0" noProof="0" dirty="0">
-                <a:ln>
-                  <a:noFill/>
-                </a:ln>
+          <a:lstStyle/>
+          <a:p>
+            <a:r>
+              <a:rPr lang="ja-JP" altLang="en-US" dirty="0">
                 <a:solidFill>
                   <a:srgbClr val="070F26"/>
                 </a:solidFill>
-                <a:effectLst/>
-                <a:uLnTx/>
-                <a:uFillTx/>
                 <a:latin typeface="Meiryo UI"/>
                 <a:ea typeface="Meiryo UI"/>
               </a:rPr>
               <a:t>提案の実施について</a:t>
             </a:r>
+            <a:endParaRPr lang="ja-JP" altLang="en-US" dirty="0"/>
           </a:p>
         </p:txBody>
       </p:sp>
@@ -9222,8 +8504,8 @@
         </p:nvSpPr>
         <p:spPr>
           <a:xfrm>
-            <a:off x="838200" y="914400"/>
-            <a:ext cx="7920000" cy="3240157"/>
+            <a:off x="168275" y="1073150"/>
+            <a:ext cx="11877675" cy="5103813"/>
           </a:xfrm>
         </p:spPr>
         <p:txBody>
@@ -9239,10 +8521,7 @@
             <a:endParaRPr lang="en-US" altLang="ja-JP" dirty="0"/>
           </a:p>
           <a:p>
-            <a:pPr marL="914400" lvl="1" indent="-457200">
-              <a:buFont typeface="+mj-lt"/>
-              <a:buAutoNum type="arabicPeriod"/>
-            </a:pPr>
+            <a:pPr lvl="1"/>
             <a:r>
               <a:rPr lang="ja-JP" altLang="en-US" dirty="0"/>
               <a:t>発表順の決定</a:t>
@@ -9258,10 +8537,7 @@
             <a:endParaRPr lang="en-US" altLang="ja-JP" dirty="0"/>
           </a:p>
           <a:p>
-            <a:pPr marL="914400" lvl="1" indent="-457200">
-              <a:buFont typeface="+mj-lt"/>
-              <a:buAutoNum type="arabicPeriod"/>
-            </a:pPr>
+            <a:pPr lvl="1"/>
             <a:r>
               <a:rPr lang="ja-JP" altLang="en-US" dirty="0"/>
               <a:t>提案の実施</a:t>
@@ -9277,10 +8553,7 @@
             <a:endParaRPr lang="en-US" altLang="ja-JP" dirty="0"/>
           </a:p>
           <a:p>
-            <a:pPr marL="914400" lvl="1" indent="-457200">
-              <a:buFont typeface="+mj-lt"/>
-              <a:buAutoNum type="arabicPeriod"/>
-            </a:pPr>
+            <a:pPr lvl="1"/>
             <a:r>
               <a:rPr lang="ja-JP" altLang="en-US" dirty="0"/>
               <a:t>提案のフィードバック</a:t>
@@ -9629,211 +8902,38 @@
       </p:grpSpPr>
       <p:sp>
         <p:nvSpPr>
-          <p:cNvPr id="69" name="タイトル 1">
-            <a:extLst>
-              <a:ext uri="{FF2B5EF4-FFF2-40B4-BE49-F238E27FC236}">
-                <a16:creationId xmlns:a16="http://schemas.microsoft.com/office/drawing/2014/main" id="{7BE631AC-0FCF-57F9-F8EF-89A8D55B3070}"/>
-              </a:ext>
-            </a:extLst>
-          </p:cNvPr>
-          <p:cNvSpPr txBox="1">
-            <a:spLocks/>
+          <p:cNvPr id="5" name="タイトル 4">
+            <a:extLst>
+              <a:ext uri="{FF2B5EF4-FFF2-40B4-BE49-F238E27FC236}">
+                <a16:creationId xmlns:a16="http://schemas.microsoft.com/office/drawing/2014/main" id="{CBBD2D39-9BB3-A10F-9025-1AAA20A410ED}"/>
+              </a:ext>
+            </a:extLst>
+          </p:cNvPr>
+          <p:cNvSpPr>
+            <a:spLocks noGrp="1"/>
           </p:cNvSpPr>
-          <p:nvPr/>
-        </p:nvSpPr>
-        <p:spPr>
-          <a:xfrm>
-            <a:off x="370800" y="334800"/>
-            <a:ext cx="11448000" cy="396000"/>
-          </a:xfrm>
-          <a:prstGeom prst="rect">
-            <a:avLst/>
-          </a:prstGeom>
-        </p:spPr>
-        <p:txBody>
-          <a:bodyPr vert="horz" lIns="0" tIns="0" rIns="0" bIns="0" rtlCol="0" anchor="t" anchorCtr="0">
-            <a:noAutofit/>
+          <p:nvPr>
+            <p:ph type="title"/>
+          </p:nvPr>
+        </p:nvSpPr>
+        <p:spPr/>
+        <p:txBody>
+          <a:bodyPr>
+            <a:normAutofit/>
           </a:bodyPr>
-          <a:lstStyle>
-            <a:lvl1pPr algn="l" defTabSz="609555" rtl="0" eaLnBrk="1" fontAlgn="base" hangingPunct="1">
-              <a:spcBef>
-                <a:spcPct val="0"/>
-              </a:spcBef>
-              <a:spcAft>
-                <a:spcPct val="0"/>
-              </a:spcAft>
-              <a:defRPr kumimoji="1" sz="2600" b="1" i="0" kern="1200" spc="0" baseline="0">
-                <a:solidFill>
-                  <a:schemeClr val="accent1"/>
-                </a:solidFill>
-                <a:latin typeface="+mj-ea"/>
-                <a:ea typeface="+mj-ea"/>
-                <a:cs typeface="HGPGothicE" charset="-128"/>
-              </a:defRPr>
-            </a:lvl1pPr>
-            <a:lvl2pPr algn="l" defTabSz="609555" rtl="0" eaLnBrk="1" fontAlgn="base" hangingPunct="1">
-              <a:spcBef>
-                <a:spcPct val="0"/>
-              </a:spcBef>
-              <a:spcAft>
-                <a:spcPct val="0"/>
-              </a:spcAft>
-              <a:defRPr kumimoji="1" sz="2667">
-                <a:solidFill>
-                  <a:schemeClr val="tx1"/>
-                </a:solidFill>
-                <a:latin typeface="Arial" pitchFamily="34" charset="0"/>
-                <a:ea typeface="HGP創英角ｺﾞｼｯｸUB"/>
-                <a:cs typeface="Arial" pitchFamily="34" charset="0"/>
-              </a:defRPr>
-            </a:lvl2pPr>
-            <a:lvl3pPr algn="l" defTabSz="609555" rtl="0" eaLnBrk="1" fontAlgn="base" hangingPunct="1">
-              <a:spcBef>
-                <a:spcPct val="0"/>
-              </a:spcBef>
-              <a:spcAft>
-                <a:spcPct val="0"/>
-              </a:spcAft>
-              <a:defRPr kumimoji="1" sz="2667">
-                <a:solidFill>
-                  <a:schemeClr val="tx1"/>
-                </a:solidFill>
-                <a:latin typeface="Arial" pitchFamily="34" charset="0"/>
-                <a:ea typeface="HGP創英角ｺﾞｼｯｸUB"/>
-                <a:cs typeface="Arial" pitchFamily="34" charset="0"/>
-              </a:defRPr>
-            </a:lvl3pPr>
-            <a:lvl4pPr algn="l" defTabSz="609555" rtl="0" eaLnBrk="1" fontAlgn="base" hangingPunct="1">
-              <a:spcBef>
-                <a:spcPct val="0"/>
-              </a:spcBef>
-              <a:spcAft>
-                <a:spcPct val="0"/>
-              </a:spcAft>
-              <a:defRPr kumimoji="1" sz="2667">
-                <a:solidFill>
-                  <a:schemeClr val="tx1"/>
-                </a:solidFill>
-                <a:latin typeface="Arial" pitchFamily="34" charset="0"/>
-                <a:ea typeface="HGP創英角ｺﾞｼｯｸUB"/>
-                <a:cs typeface="Arial" pitchFamily="34" charset="0"/>
-              </a:defRPr>
-            </a:lvl4pPr>
-            <a:lvl5pPr algn="l" defTabSz="609555" rtl="0" eaLnBrk="1" fontAlgn="base" hangingPunct="1">
-              <a:spcBef>
-                <a:spcPct val="0"/>
-              </a:spcBef>
-              <a:spcAft>
-                <a:spcPct val="0"/>
-              </a:spcAft>
-              <a:defRPr kumimoji="1" sz="2667">
-                <a:solidFill>
-                  <a:schemeClr val="tx1"/>
-                </a:solidFill>
-                <a:latin typeface="Arial" pitchFamily="34" charset="0"/>
-                <a:ea typeface="HGP創英角ｺﾞｼｯｸUB"/>
-                <a:cs typeface="Arial" pitchFamily="34" charset="0"/>
-              </a:defRPr>
-            </a:lvl5pPr>
-            <a:lvl6pPr marL="609555" algn="l" defTabSz="609555" rtl="0" eaLnBrk="1" fontAlgn="base" hangingPunct="1">
-              <a:spcBef>
-                <a:spcPct val="0"/>
-              </a:spcBef>
-              <a:spcAft>
-                <a:spcPct val="0"/>
-              </a:spcAft>
-              <a:defRPr kumimoji="1" sz="2667">
-                <a:solidFill>
-                  <a:schemeClr val="tx1"/>
-                </a:solidFill>
-                <a:latin typeface="Arial" pitchFamily="34" charset="0"/>
-                <a:ea typeface="HGP創英角ｺﾞｼｯｸUB"/>
-                <a:cs typeface="Arial" pitchFamily="34" charset="0"/>
-              </a:defRPr>
-            </a:lvl6pPr>
-            <a:lvl7pPr marL="1219110" algn="l" defTabSz="609555" rtl="0" eaLnBrk="1" fontAlgn="base" hangingPunct="1">
-              <a:spcBef>
-                <a:spcPct val="0"/>
-              </a:spcBef>
-              <a:spcAft>
-                <a:spcPct val="0"/>
-              </a:spcAft>
-              <a:defRPr kumimoji="1" sz="2667">
-                <a:solidFill>
-                  <a:schemeClr val="tx1"/>
-                </a:solidFill>
-                <a:latin typeface="Arial" pitchFamily="34" charset="0"/>
-                <a:ea typeface="HGP創英角ｺﾞｼｯｸUB"/>
-                <a:cs typeface="Arial" pitchFamily="34" charset="0"/>
-              </a:defRPr>
-            </a:lvl7pPr>
-            <a:lvl8pPr marL="1828664" algn="l" defTabSz="609555" rtl="0" eaLnBrk="1" fontAlgn="base" hangingPunct="1">
-              <a:spcBef>
-                <a:spcPct val="0"/>
-              </a:spcBef>
-              <a:spcAft>
-                <a:spcPct val="0"/>
-              </a:spcAft>
-              <a:defRPr kumimoji="1" sz="2667">
-                <a:solidFill>
-                  <a:schemeClr val="tx1"/>
-                </a:solidFill>
-                <a:latin typeface="Arial" pitchFamily="34" charset="0"/>
-                <a:ea typeface="HGP創英角ｺﾞｼｯｸUB"/>
-                <a:cs typeface="Arial" pitchFamily="34" charset="0"/>
-              </a:defRPr>
-            </a:lvl8pPr>
-            <a:lvl9pPr marL="2438218" algn="l" defTabSz="609555" rtl="0" eaLnBrk="1" fontAlgn="base" hangingPunct="1">
-              <a:spcBef>
-                <a:spcPct val="0"/>
-              </a:spcBef>
-              <a:spcAft>
-                <a:spcPct val="0"/>
-              </a:spcAft>
-              <a:defRPr kumimoji="1" sz="2667">
-                <a:solidFill>
-                  <a:schemeClr val="tx1"/>
-                </a:solidFill>
-                <a:latin typeface="Arial" pitchFamily="34" charset="0"/>
-                <a:ea typeface="HGP創英角ｺﾞｼｯｸUB"/>
-                <a:cs typeface="Arial" pitchFamily="34" charset="0"/>
-              </a:defRPr>
-            </a:lvl9pPr>
-          </a:lstStyle>
-          <a:p>
-            <a:pPr marL="0" marR="0" lvl="0" indent="0" algn="l" defTabSz="609555" rtl="0" eaLnBrk="1" fontAlgn="base" latinLnBrk="0" hangingPunct="1">
-              <a:lnSpc>
-                <a:spcPct val="100000"/>
-              </a:lnSpc>
-              <a:spcBef>
-                <a:spcPct val="0"/>
-              </a:spcBef>
-              <a:spcAft>
-                <a:spcPct val="0"/>
-              </a:spcAft>
-              <a:buClrTx/>
-              <a:buSzTx/>
-              <a:buFontTx/>
-              <a:buNone/>
-              <a:tabLst/>
-              <a:defRPr/>
-            </a:pPr>
-            <a:r>
-              <a:rPr kumimoji="1" lang="ja-JP" altLang="en-US" sz="2600" b="1" i="0" u="none" strike="noStrike" kern="1200" cap="none" spc="0" normalizeH="0" baseline="0" noProof="0" dirty="0">
-                <a:ln>
-                  <a:noFill/>
-                </a:ln>
+          <a:lstStyle/>
+          <a:p>
+            <a:r>
+              <a:rPr lang="ja-JP" altLang="en-US" dirty="0">
                 <a:solidFill>
                   <a:srgbClr val="070F26"/>
                 </a:solidFill>
-                <a:effectLst/>
-                <a:uLnTx/>
-                <a:uFillTx/>
                 <a:latin typeface="Meiryo UI"/>
                 <a:ea typeface="Meiryo UI"/>
               </a:rPr>
               <a:t>提案の改善について</a:t>
             </a:r>
+            <a:endParaRPr lang="ja-JP" altLang="en-US" dirty="0"/>
           </a:p>
         </p:txBody>
       </p:sp>
@@ -9855,8 +8955,8 @@
         </p:nvSpPr>
         <p:spPr>
           <a:xfrm>
-            <a:off x="838200" y="914400"/>
-            <a:ext cx="8116957" cy="5242685"/>
+            <a:off x="168275" y="1073150"/>
+            <a:ext cx="11877675" cy="5103813"/>
           </a:xfrm>
         </p:spPr>
         <p:txBody>
@@ -9872,10 +8972,7 @@
             <a:endParaRPr lang="en-US" altLang="ja-JP" dirty="0"/>
           </a:p>
           <a:p>
-            <a:pPr marL="914400" lvl="1" indent="-457200">
-              <a:buFont typeface="+mj-lt"/>
-              <a:buAutoNum type="arabicPeriod"/>
-            </a:pPr>
+            <a:pPr lvl="1"/>
             <a:r>
               <a:rPr lang="ja-JP" altLang="en-US" dirty="0"/>
               <a:t>フィードバック内容の整理</a:t>
@@ -9891,10 +8988,7 @@
             <a:endParaRPr lang="en-US" altLang="ja-JP" dirty="0"/>
           </a:p>
           <a:p>
-            <a:pPr marL="914400" lvl="1" indent="-457200">
-              <a:buFont typeface="+mj-lt"/>
-              <a:buAutoNum type="arabicPeriod"/>
-            </a:pPr>
+            <a:pPr lvl="1"/>
             <a:r>
               <a:rPr lang="ja-JP" altLang="en-US" dirty="0"/>
               <a:t>提案資料の修正</a:t>
@@ -9910,10 +9004,7 @@
             <a:endParaRPr lang="en-US" altLang="ja-JP" dirty="0"/>
           </a:p>
           <a:p>
-            <a:pPr marL="914400" lvl="1" indent="-457200">
-              <a:buFont typeface="+mj-lt"/>
-              <a:buAutoNum type="arabicPeriod"/>
-            </a:pPr>
+            <a:pPr lvl="1"/>
             <a:r>
               <a:rPr lang="ja-JP" altLang="en-US" dirty="0"/>
               <a:t>提案資料の確認</a:t>
@@ -9937,10 +9028,7 @@
             <a:endParaRPr lang="en-US" altLang="ja-JP" dirty="0"/>
           </a:p>
           <a:p>
-            <a:pPr marL="914400" lvl="1" indent="-457200">
-              <a:buFont typeface="+mj-lt"/>
-              <a:buAutoNum type="arabicPeriod"/>
-            </a:pPr>
+            <a:pPr lvl="1"/>
             <a:r>
               <a:rPr lang="ja-JP" altLang="en-US" dirty="0"/>
               <a:t>提案資料の提出</a:t>
@@ -9956,9 +9044,7 @@
             <a:endParaRPr lang="en-US" altLang="ja-JP" dirty="0"/>
           </a:p>
           <a:p>
-            <a:pPr marL="1371600" lvl="3" indent="0">
-              <a:buNone/>
-            </a:pPr>
+            <a:pPr lvl="3"/>
             <a:r>
               <a:rPr lang="en-US" altLang="ja-JP" dirty="0"/>
               <a:t>※</a:t>
@@ -9970,10 +9056,7 @@
             <a:endParaRPr lang="en-US" altLang="ja-JP" dirty="0"/>
           </a:p>
           <a:p>
-            <a:pPr marL="914400" lvl="1" indent="-457200">
-              <a:buFont typeface="+mj-lt"/>
-              <a:buAutoNum type="arabicPeriod"/>
-            </a:pPr>
+            <a:pPr lvl="1"/>
             <a:r>
               <a:rPr lang="ja-JP" altLang="en-US" dirty="0"/>
               <a:t>最終発表の準備</a:t>

--- a/00_オリエンテーション/【AI Native研修-提案研修】研修の概要.pptx
+++ b/00_オリエンテーション/【AI Native研修-提案研修】研修の概要.pptx
@@ -8262,7 +8262,10 @@
             <a:endParaRPr lang="en-US" altLang="ja-JP" dirty="0"/>
           </a:p>
           <a:p>
-            <a:pPr lvl="1"/>
+            <a:pPr marL="914400" lvl="1" indent="-457200">
+              <a:buFont typeface="+mj-lt"/>
+              <a:buAutoNum type="arabicPeriod"/>
+            </a:pPr>
             <a:r>
               <a:rPr lang="ja-JP" altLang="en-US" dirty="0"/>
               <a:t>提案テーマの検討</a:t>
@@ -8278,7 +8281,10 @@
             <a:endParaRPr lang="en-US" altLang="ja-JP" dirty="0"/>
           </a:p>
           <a:p>
-            <a:pPr lvl="1"/>
+            <a:pPr marL="914400" lvl="1" indent="-457200">
+              <a:buFont typeface="+mj-lt"/>
+              <a:buAutoNum type="arabicPeriod"/>
+            </a:pPr>
             <a:r>
               <a:rPr lang="ja-JP" altLang="en-US" dirty="0"/>
               <a:t>提案テーマの意見交換</a:t>
@@ -8294,7 +8300,10 @@
             <a:endParaRPr lang="en-US" altLang="ja-JP" dirty="0"/>
           </a:p>
           <a:p>
-            <a:pPr lvl="1"/>
+            <a:pPr marL="914400" lvl="1" indent="-457200">
+              <a:buFont typeface="+mj-lt"/>
+              <a:buAutoNum type="arabicPeriod"/>
+            </a:pPr>
             <a:r>
               <a:rPr lang="ja-JP" altLang="en-US" dirty="0"/>
               <a:t>提案内容の調査</a:t>
@@ -8318,7 +8327,10 @@
             <a:endParaRPr lang="en-US" altLang="ja-JP" dirty="0"/>
           </a:p>
           <a:p>
-            <a:pPr lvl="1"/>
+            <a:pPr marL="914400" lvl="1" indent="-457200">
+              <a:buFont typeface="+mj-lt"/>
+              <a:buAutoNum type="arabicPeriod"/>
+            </a:pPr>
             <a:r>
               <a:rPr lang="ja-JP" altLang="en-US" dirty="0"/>
               <a:t>提案内容の具体化</a:t>
@@ -8342,7 +8354,10 @@
             <a:endParaRPr lang="en-US" altLang="ja-JP" dirty="0"/>
           </a:p>
           <a:p>
-            <a:pPr lvl="1"/>
+            <a:pPr marL="914400" lvl="1" indent="-457200">
+              <a:buFont typeface="+mj-lt"/>
+              <a:buAutoNum type="arabicPeriod"/>
+            </a:pPr>
             <a:r>
               <a:rPr lang="ja-JP" altLang="en-US" dirty="0"/>
               <a:t>提案資料の作成</a:t>
@@ -8366,7 +8381,10 @@
             <a:endParaRPr lang="en-US" altLang="ja-JP" dirty="0"/>
           </a:p>
           <a:p>
-            <a:pPr lvl="1"/>
+            <a:pPr marL="914400" lvl="1" indent="-457200">
+              <a:buFont typeface="+mj-lt"/>
+              <a:buAutoNum type="arabicPeriod"/>
+            </a:pPr>
             <a:r>
               <a:rPr lang="ja-JP" altLang="en-US" dirty="0"/>
               <a:t>提案資料の提出</a:t>
@@ -8521,7 +8539,10 @@
             <a:endParaRPr lang="en-US" altLang="ja-JP" dirty="0"/>
           </a:p>
           <a:p>
-            <a:pPr lvl="1"/>
+            <a:pPr marL="914400" lvl="1" indent="-457200">
+              <a:buFont typeface="+mj-lt"/>
+              <a:buAutoNum type="arabicPeriod"/>
+            </a:pPr>
             <a:r>
               <a:rPr lang="ja-JP" altLang="en-US" dirty="0"/>
               <a:t>発表順の決定</a:t>
@@ -8537,7 +8558,10 @@
             <a:endParaRPr lang="en-US" altLang="ja-JP" dirty="0"/>
           </a:p>
           <a:p>
-            <a:pPr lvl="1"/>
+            <a:pPr marL="914400" lvl="1" indent="-457200">
+              <a:buFont typeface="+mj-lt"/>
+              <a:buAutoNum type="arabicPeriod"/>
+            </a:pPr>
             <a:r>
               <a:rPr lang="ja-JP" altLang="en-US" dirty="0"/>
               <a:t>提案の実施</a:t>
@@ -8553,7 +8577,10 @@
             <a:endParaRPr lang="en-US" altLang="ja-JP" dirty="0"/>
           </a:p>
           <a:p>
-            <a:pPr lvl="1"/>
+            <a:pPr marL="914400" lvl="1" indent="-457200">
+              <a:buFont typeface="+mj-lt"/>
+              <a:buAutoNum type="arabicPeriod"/>
+            </a:pPr>
             <a:r>
               <a:rPr lang="ja-JP" altLang="en-US" dirty="0"/>
               <a:t>提案のフィードバック</a:t>
@@ -8616,7 +8643,7 @@
         </p:nvSpPr>
         <p:spPr>
           <a:xfrm>
-            <a:off x="838200" y="4571861"/>
+            <a:off x="167951" y="5062702"/>
             <a:ext cx="7920000" cy="1282287"/>
           </a:xfrm>
           <a:prstGeom prst="rect">
@@ -8972,7 +8999,10 @@
             <a:endParaRPr lang="en-US" altLang="ja-JP" dirty="0"/>
           </a:p>
           <a:p>
-            <a:pPr lvl="1"/>
+            <a:pPr marL="914400" lvl="1" indent="-457200">
+              <a:buFont typeface="+mj-lt"/>
+              <a:buAutoNum type="arabicPeriod"/>
+            </a:pPr>
             <a:r>
               <a:rPr lang="ja-JP" altLang="en-US" dirty="0"/>
               <a:t>フィードバック内容の整理</a:t>
@@ -8988,7 +9018,10 @@
             <a:endParaRPr lang="en-US" altLang="ja-JP" dirty="0"/>
           </a:p>
           <a:p>
-            <a:pPr lvl="1"/>
+            <a:pPr marL="914400" lvl="1" indent="-457200">
+              <a:buFont typeface="+mj-lt"/>
+              <a:buAutoNum type="arabicPeriod"/>
+            </a:pPr>
             <a:r>
               <a:rPr lang="ja-JP" altLang="en-US" dirty="0"/>
               <a:t>提案資料の修正</a:t>
@@ -9004,7 +9037,10 @@
             <a:endParaRPr lang="en-US" altLang="ja-JP" dirty="0"/>
           </a:p>
           <a:p>
-            <a:pPr lvl="1"/>
+            <a:pPr marL="914400" lvl="1" indent="-457200">
+              <a:buFont typeface="+mj-lt"/>
+              <a:buAutoNum type="arabicPeriod"/>
+            </a:pPr>
             <a:r>
               <a:rPr lang="ja-JP" altLang="en-US" dirty="0"/>
               <a:t>提案資料の確認</a:t>
@@ -9028,7 +9064,10 @@
             <a:endParaRPr lang="en-US" altLang="ja-JP" dirty="0"/>
           </a:p>
           <a:p>
-            <a:pPr lvl="1"/>
+            <a:pPr marL="914400" lvl="1" indent="-457200">
+              <a:buFont typeface="+mj-lt"/>
+              <a:buAutoNum type="arabicPeriod"/>
+            </a:pPr>
             <a:r>
               <a:rPr lang="ja-JP" altLang="en-US" dirty="0"/>
               <a:t>提案資料の提出</a:t>
@@ -9056,7 +9095,10 @@
             <a:endParaRPr lang="en-US" altLang="ja-JP" dirty="0"/>
           </a:p>
           <a:p>
-            <a:pPr lvl="1"/>
+            <a:pPr marL="914400" lvl="1" indent="-457200">
+              <a:buFont typeface="+mj-lt"/>
+              <a:buAutoNum type="arabicPeriod"/>
+            </a:pPr>
             <a:r>
               <a:rPr lang="ja-JP" altLang="en-US" dirty="0"/>
               <a:t>最終発表の準備</a:t>
